--- a/media/resources/files/EkiOrunduuOnduktar_Kemituu_SandarJanaSozdor_wu6vpM5.pptx
+++ b/media/resources/files/EkiOrunduuOnduktar_Kemituu_SandarJanaSozdor_wu6vpM5.pptx
@@ -5186,7 +5186,7 @@
                   <a:schemeClr val="tx1"/>
                 </a:solidFill>
               </a:rPr>
-              <a:t>0.63</a:t>
+              <a:t>0,63</a:t>
             </a:r>
           </a:p>
         </p:txBody>
@@ -5544,7 +5544,7 @@
                   <a:schemeClr val="tx1"/>
                 </a:solidFill>
               </a:rPr>
-              <a:t>2.19</a:t>
+              <a:t>2,19</a:t>
             </a:r>
           </a:p>
         </p:txBody>
@@ -5902,7 +5902,7 @@
                   <a:schemeClr val="tx1"/>
                 </a:solidFill>
               </a:rPr>
-              <a:t>2.1</a:t>
+              <a:t>2,1</a:t>
             </a:r>
           </a:p>
         </p:txBody>
@@ -6260,7 +6260,7 @@
                   <a:schemeClr val="tx1"/>
                 </a:solidFill>
               </a:rPr>
-              <a:t>0.37</a:t>
+              <a:t>0,37</a:t>
             </a:r>
           </a:p>
         </p:txBody>
@@ -6618,7 +6618,7 @@
                   <a:schemeClr val="tx1"/>
                 </a:solidFill>
               </a:rPr>
-              <a:t>0.19</a:t>
+              <a:t>0,19</a:t>
             </a:r>
           </a:p>
         </p:txBody>
@@ -6976,7 +6976,7 @@
                   <a:schemeClr val="tx1"/>
                 </a:solidFill>
               </a:rPr>
-              <a:t>2.35</a:t>
+              <a:t>2,35</a:t>
             </a:r>
           </a:p>
         </p:txBody>
@@ -7334,7 +7334,7 @@
                   <a:schemeClr val="tx1"/>
                 </a:solidFill>
               </a:rPr>
-              <a:t>5.3</a:t>
+              <a:t>5,3</a:t>
             </a:r>
           </a:p>
         </p:txBody>
@@ -7692,7 +7692,7 @@
                   <a:schemeClr val="tx1"/>
                 </a:solidFill>
               </a:rPr>
-              <a:t>2.1</a:t>
+              <a:t>2,1</a:t>
             </a:r>
           </a:p>
         </p:txBody>
@@ -8050,7 +8050,7 @@
                   <a:schemeClr val="tx1"/>
                 </a:solidFill>
               </a:rPr>
-              <a:t>0.35</a:t>
+              <a:t>0,35</a:t>
             </a:r>
           </a:p>
         </p:txBody>
@@ -8549,7 +8549,7 @@
                   <a:schemeClr val="tx1"/>
                 </a:solidFill>
               </a:rPr>
-              <a:t>2.47</a:t>
+              <a:t>2,47</a:t>
             </a:r>
           </a:p>
         </p:txBody>
@@ -9048,7 +9048,7 @@
                   <a:schemeClr val="tx1"/>
                 </a:solidFill>
               </a:rPr>
-              <a:t>0.96</a:t>
+              <a:t>0,96</a:t>
             </a:r>
           </a:p>
         </p:txBody>
@@ -9547,7 +9547,7 @@
                   <a:schemeClr val="tx1"/>
                 </a:solidFill>
               </a:rPr>
-              <a:t>2.54</a:t>
+              <a:t>2,54</a:t>
             </a:r>
           </a:p>
         </p:txBody>
@@ -10046,7 +10046,7 @@
                   <a:schemeClr val="tx1"/>
                 </a:solidFill>
               </a:rPr>
-              <a:t>0.2</a:t>
+              <a:t>0,2</a:t>
             </a:r>
           </a:p>
         </p:txBody>
@@ -10372,7 +10372,7 @@
                   <a:srgbClr val="0070C0"/>
                 </a:solidFill>
               </a:rPr>
-              <a:t>0.43</a:t>
+              <a:t>0,43</a:t>
             </a:r>
             <a:endParaRPr lang="en-GB" sz="1600" b="1" dirty="0">
               <a:solidFill>
@@ -10495,7 +10495,7 @@
                   <a:schemeClr val="tx1"/>
                 </a:solidFill>
               </a:rPr>
-              <a:t>0.63</a:t>
+              <a:t>0,63</a:t>
             </a:r>
           </a:p>
         </p:txBody>
@@ -10738,7 +10738,7 @@
                   <a:srgbClr val="0070C0"/>
                 </a:solidFill>
               </a:rPr>
-              <a:t>2.12</a:t>
+              <a:t>2,12</a:t>
             </a:r>
             <a:endParaRPr lang="en-GB" sz="1600" b="1" dirty="0">
               <a:solidFill>
@@ -10861,7 +10861,7 @@
                   <a:schemeClr val="tx1"/>
                 </a:solidFill>
               </a:rPr>
-              <a:t>2.19</a:t>
+              <a:t>2,19</a:t>
             </a:r>
           </a:p>
         </p:txBody>
@@ -11104,7 +11104,7 @@
                   <a:srgbClr val="0070C0"/>
                 </a:solidFill>
               </a:rPr>
-              <a:t>1.9</a:t>
+              <a:t>1,9</a:t>
             </a:r>
             <a:endParaRPr lang="en-GB" sz="1600" b="1" dirty="0">
               <a:solidFill>
@@ -11227,7 +11227,7 @@
                   <a:schemeClr val="tx1"/>
                 </a:solidFill>
               </a:rPr>
-              <a:t>2.1</a:t>
+              <a:t>2,1</a:t>
             </a:r>
           </a:p>
         </p:txBody>
@@ -11470,7 +11470,7 @@
                   <a:srgbClr val="0070C0"/>
                 </a:solidFill>
               </a:rPr>
-              <a:t>0.07</a:t>
+              <a:t>0,07</a:t>
             </a:r>
             <a:endParaRPr lang="en-GB" sz="1600" b="1" dirty="0">
               <a:solidFill>
@@ -11593,7 +11593,7 @@
                   <a:schemeClr val="tx1"/>
                 </a:solidFill>
               </a:rPr>
-              <a:t>0.37</a:t>
+              <a:t>0,37</a:t>
             </a:r>
           </a:p>
         </p:txBody>
@@ -11836,7 +11836,7 @@
                   <a:srgbClr val="0070C0"/>
                 </a:solidFill>
               </a:rPr>
-              <a:t>0.1</a:t>
+              <a:t>0,1</a:t>
             </a:r>
             <a:endParaRPr lang="en-GB" sz="1600" b="1" dirty="0">
               <a:solidFill>
@@ -11959,7 +11959,7 @@
                   <a:schemeClr val="tx1"/>
                 </a:solidFill>
               </a:rPr>
-              <a:t>0.19</a:t>
+              <a:t>0,19</a:t>
             </a:r>
           </a:p>
         </p:txBody>
@@ -12202,7 +12202,7 @@
                   <a:srgbClr val="0070C0"/>
                 </a:solidFill>
               </a:rPr>
-              <a:t>1.75</a:t>
+              <a:t>1,75</a:t>
             </a:r>
             <a:endParaRPr lang="en-GB" sz="1600" b="1" dirty="0">
               <a:solidFill>
@@ -12325,7 +12325,7 @@
                   <a:schemeClr val="tx1"/>
                 </a:solidFill>
               </a:rPr>
-              <a:t>2.35</a:t>
+              <a:t>2,35</a:t>
             </a:r>
           </a:p>
         </p:txBody>
@@ -12568,7 +12568,7 @@
                   <a:srgbClr val="0070C0"/>
                 </a:solidFill>
               </a:rPr>
-              <a:t>5.29</a:t>
+              <a:t>5,29</a:t>
             </a:r>
             <a:endParaRPr lang="en-GB" sz="1600" b="1" dirty="0">
               <a:solidFill>
@@ -12691,7 +12691,7 @@
                   <a:schemeClr val="tx1"/>
                 </a:solidFill>
               </a:rPr>
-              <a:t>5.3</a:t>
+              <a:t>5,3</a:t>
             </a:r>
           </a:p>
         </p:txBody>
@@ -13049,7 +13049,7 @@
                   <a:schemeClr val="tx1"/>
                 </a:solidFill>
               </a:rPr>
-              <a:t>2.1</a:t>
+              <a:t>2,1</a:t>
             </a:r>
           </a:p>
         </p:txBody>
@@ -13407,7 +13407,7 @@
                   <a:schemeClr val="tx1"/>
                 </a:solidFill>
               </a:rPr>
-              <a:t>0.35</a:t>
+              <a:t>0,35</a:t>
             </a:r>
           </a:p>
         </p:txBody>
@@ -13906,7 +13906,7 @@
                   <a:schemeClr val="tx1"/>
                 </a:solidFill>
               </a:rPr>
-              <a:t>2.47</a:t>
+              <a:t>2,47</a:t>
             </a:r>
           </a:p>
         </p:txBody>
@@ -14405,7 +14405,7 @@
                   <a:schemeClr val="tx1"/>
                 </a:solidFill>
               </a:rPr>
-              <a:t>0.96</a:t>
+              <a:t>0,96</a:t>
             </a:r>
           </a:p>
         </p:txBody>
@@ -14904,7 +14904,7 @@
                   <a:schemeClr val="tx1"/>
                 </a:solidFill>
               </a:rPr>
-              <a:t>2.54</a:t>
+              <a:t>2,54</a:t>
             </a:r>
           </a:p>
         </p:txBody>
@@ -15403,7 +15403,7 @@
                   <a:schemeClr val="tx1"/>
                 </a:solidFill>
               </a:rPr>
-              <a:t>0.2</a:t>
+              <a:t>0,2</a:t>
             </a:r>
           </a:p>
         </p:txBody>
@@ -15729,7 +15729,7 @@
                   <a:srgbClr val="0070C0"/>
                 </a:solidFill>
               </a:rPr>
-              <a:t>0.43</a:t>
+              <a:t>0,43</a:t>
             </a:r>
             <a:endParaRPr lang="en-GB" sz="1600" b="1" dirty="0">
               <a:solidFill>
@@ -15852,7 +15852,7 @@
                   <a:schemeClr val="tx1"/>
                 </a:solidFill>
               </a:rPr>
-              <a:t>0.63</a:t>
+              <a:t>0,63</a:t>
             </a:r>
           </a:p>
         </p:txBody>
@@ -16095,7 +16095,7 @@
                   <a:srgbClr val="0070C0"/>
                 </a:solidFill>
               </a:rPr>
-              <a:t>2.12</a:t>
+              <a:t>2,12</a:t>
             </a:r>
             <a:endParaRPr lang="en-GB" sz="1600" b="1" dirty="0">
               <a:solidFill>
@@ -16218,7 +16218,7 @@
                   <a:schemeClr val="tx1"/>
                 </a:solidFill>
               </a:rPr>
-              <a:t>2.19</a:t>
+              <a:t>2,19</a:t>
             </a:r>
           </a:p>
         </p:txBody>
@@ -16461,7 +16461,7 @@
                   <a:srgbClr val="0070C0"/>
                 </a:solidFill>
               </a:rPr>
-              <a:t>1.9</a:t>
+              <a:t>1,9</a:t>
             </a:r>
             <a:endParaRPr lang="en-GB" sz="1600" b="1" dirty="0">
               <a:solidFill>
@@ -16584,7 +16584,7 @@
                   <a:schemeClr val="tx1"/>
                 </a:solidFill>
               </a:rPr>
-              <a:t>2.1</a:t>
+              <a:t>2,1</a:t>
             </a:r>
           </a:p>
         </p:txBody>
@@ -16827,7 +16827,7 @@
                   <a:srgbClr val="0070C0"/>
                 </a:solidFill>
               </a:rPr>
-              <a:t>0.07</a:t>
+              <a:t>0,07</a:t>
             </a:r>
             <a:endParaRPr lang="en-GB" sz="1600" b="1" dirty="0">
               <a:solidFill>
@@ -16950,7 +16950,7 @@
                   <a:schemeClr val="tx1"/>
                 </a:solidFill>
               </a:rPr>
-              <a:t>0.37</a:t>
+              <a:t>0,37</a:t>
             </a:r>
           </a:p>
         </p:txBody>
@@ -17193,7 +17193,7 @@
                   <a:srgbClr val="0070C0"/>
                 </a:solidFill>
               </a:rPr>
-              <a:t>0.1</a:t>
+              <a:t>0,1</a:t>
             </a:r>
             <a:endParaRPr lang="en-GB" sz="1600" b="1" dirty="0">
               <a:solidFill>
@@ -17316,7 +17316,7 @@
                   <a:schemeClr val="tx1"/>
                 </a:solidFill>
               </a:rPr>
-              <a:t>0.19</a:t>
+              <a:t>0,19</a:t>
             </a:r>
           </a:p>
         </p:txBody>
@@ -17559,7 +17559,7 @@
                   <a:srgbClr val="0070C0"/>
                 </a:solidFill>
               </a:rPr>
-              <a:t>1.75</a:t>
+              <a:t>1,75</a:t>
             </a:r>
             <a:endParaRPr lang="en-GB" sz="1600" b="1" dirty="0">
               <a:solidFill>
@@ -17682,7 +17682,7 @@
                   <a:schemeClr val="tx1"/>
                 </a:solidFill>
               </a:rPr>
-              <a:t>2.35</a:t>
+              <a:t>2,35</a:t>
             </a:r>
           </a:p>
         </p:txBody>
@@ -17925,7 +17925,7 @@
                   <a:srgbClr val="0070C0"/>
                 </a:solidFill>
               </a:rPr>
-              <a:t>5.29</a:t>
+              <a:t>5,29</a:t>
             </a:r>
             <a:endParaRPr lang="en-GB" sz="1600" b="1" dirty="0">
               <a:solidFill>
@@ -18048,7 +18048,7 @@
                   <a:schemeClr val="tx1"/>
                 </a:solidFill>
               </a:rPr>
-              <a:t>5.3</a:t>
+              <a:t>5,3</a:t>
             </a:r>
           </a:p>
         </p:txBody>
@@ -18291,7 +18291,7 @@
                   <a:srgbClr val="0070C0"/>
                 </a:solidFill>
               </a:rPr>
-              <a:t>1.99</a:t>
+              <a:t>1,99</a:t>
             </a:r>
             <a:endParaRPr lang="en-GB" sz="1600" b="1" dirty="0">
               <a:solidFill>
@@ -18414,7 +18414,7 @@
                   <a:schemeClr val="tx1"/>
                 </a:solidFill>
               </a:rPr>
-              <a:t>2.1</a:t>
+              <a:t>2,1</a:t>
             </a:r>
           </a:p>
         </p:txBody>
@@ -18657,7 +18657,7 @@
                   <a:srgbClr val="0070C0"/>
                 </a:solidFill>
               </a:rPr>
-              <a:t>0.12</a:t>
+              <a:t>0,12</a:t>
             </a:r>
             <a:endParaRPr lang="en-GB" sz="1600" b="1" dirty="0">
               <a:solidFill>
@@ -18780,7 +18780,7 @@
                   <a:schemeClr val="tx1"/>
                 </a:solidFill>
               </a:rPr>
-              <a:t>0.35</a:t>
+              <a:t>0,35</a:t>
             </a:r>
           </a:p>
         </p:txBody>
@@ -19164,7 +19164,7 @@
                   <a:srgbClr val="0070C0"/>
                 </a:solidFill>
               </a:rPr>
-              <a:t>2.09</a:t>
+              <a:t>2,09</a:t>
             </a:r>
             <a:endParaRPr lang="en-GB" sz="1600" b="1" dirty="0">
               <a:solidFill>
@@ -19287,7 +19287,7 @@
                   <a:schemeClr val="tx1"/>
                 </a:solidFill>
               </a:rPr>
-              <a:t>2.47</a:t>
+              <a:t>2,47</a:t>
             </a:r>
           </a:p>
         </p:txBody>
@@ -19671,7 +19671,7 @@
                   <a:srgbClr val="0070C0"/>
                 </a:solidFill>
               </a:rPr>
-              <a:t>0.53</a:t>
+              <a:t>0,53</a:t>
             </a:r>
             <a:endParaRPr lang="en-GB" sz="1600" b="1" dirty="0">
               <a:solidFill>
@@ -19794,7 +19794,7 @@
                   <a:schemeClr val="tx1"/>
                 </a:solidFill>
               </a:rPr>
-              <a:t>0.96</a:t>
+              <a:t>0,96</a:t>
             </a:r>
           </a:p>
         </p:txBody>
@@ -20178,7 +20178,7 @@
                   <a:srgbClr val="0070C0"/>
                 </a:solidFill>
               </a:rPr>
-              <a:t>3.15</a:t>
+              <a:t>3,15</a:t>
             </a:r>
             <a:endParaRPr lang="en-GB" sz="1600" b="1" dirty="0">
               <a:solidFill>
@@ -20301,7 +20301,7 @@
                   <a:schemeClr val="tx1"/>
                 </a:solidFill>
               </a:rPr>
-              <a:t>2.54</a:t>
+              <a:t>2,54</a:t>
             </a:r>
           </a:p>
         </p:txBody>
@@ -20685,7 +20685,7 @@
                   <a:srgbClr val="0070C0"/>
                 </a:solidFill>
               </a:rPr>
-              <a:t>0.11</a:t>
+              <a:t>0,11</a:t>
             </a:r>
             <a:endParaRPr lang="en-GB" sz="1600" b="1" dirty="0">
               <a:solidFill>
@@ -20808,7 +20808,7 @@
                   <a:schemeClr val="tx1"/>
                 </a:solidFill>
               </a:rPr>
-              <a:t>0.2</a:t>
+              <a:t>0,2</a:t>
             </a:r>
           </a:p>
         </p:txBody>
